--- a/tasks/bird_spatiotemporal_patterns/figures/fig_sp03g_across_order_point_map_graticule.pptx
+++ b/tasks/bird_spatiotemporal_patterns/figures/fig_sp03g_across_order_point_map_graticule.pptx
@@ -2258,8 +2258,8 @@
         </p:blipFill>
         <p:spPr>
           <a:xfrm>
-            <a:off x="7818120" y="5362956"/>
-            <a:ext cx="1307592" cy="1488186"/>
+            <a:off x="7699248" y="5266944"/>
+            <a:ext cx="1426464" cy="1587627"/>
           </a:xfrm>
           <a:prstGeom prst="rect">
             <a:avLst/>
